--- a/library/seminars/sem-06/rendered/sem-06-n42.pptx
+++ b/library/seminars/sem-06/rendered/sem-06-n42.pptx
@@ -502,19 +502,19 @@
           <a:lstStyle/>
           <a:p>
             <a:r>
-              <a:t>Окно роли по умолчанию не настолько чистое, каким выглядело два экрана назад. Собственный промпт и свежий контекст она получает — и вместе с ними, по умолчанию, описания всех MCP-серверов родительской сессии целиком, даже тех, что её задаче не нужны ни одним инструментом. Дословно из документации по устранению ошибок: субагенты наследуют каждое описание MCP-инструмента из родительской сессии, и это может заполнить их контекстное окно ещё до первого шага — отключайте серверы, которыми не пользуетесь, перед тем как заводить субагентов.</a:t>
+              <a:t>Контекст роли чище вашего, но не чист от всего подряд. Свой промпт и свежее начало она получает — и вместе с ними, по умолчанию, описания всех подключённых серверов целиком, даже тех, что её задаче не нужны. Это третья полоса нашей схемы — она наследуется.</a:t>
             </a:r>
           </a:p>
           <a:p/>
           <a:p>
             <a:r>
-              <a:t>Для нашего вопроса про лимит участников: если в сессии подключены трекер задач и почта из прошлого блока занятия, роль, которой нужно прочитать сорок файлов кода, получает их описания в своё окно бесплатно.</a:t>
+              <a:t>Дословно из документации по устранению ошибок: роли наследуют каждое описание инструмента из вызвавшей сессии, и это может заполнить их контекст ещё до первого шага — отключайте серверы, которыми не пользуетесь, прежде чем заводить роли.</a:t>
             </a:r>
           </a:p>
           <a:p/>
           <a:p>
             <a:r>
-              <a:t>Фокус работает для содержимого репозитория. За подключённым серверами следят отдельно — тем же списком прав, который стоял пятым блоком на одностраничнике.</a:t>
+              <a:t>Фокус работает для содержимого репозитория. За подключёнными серверами следят отдельно — тем же списком прав, который стоит пятым блоком на одностраничнике.</a:t>
             </a:r>
           </a:p>
           <a:p/>
@@ -526,19 +526,19 @@
           <a:p/>
           <a:p>
             <a:r>
-              <a:t>Если спросят, сколько это стоит в окне: цифру зал уже видел в прошлом блоке занятия, там постоянная плата за подключённые серверы измерена в токенах и в доле окна. Здесь важно другое: эта плата вносится ещё раз, отдельно, в окно каждой заведённой роли.</a:t>
+              <a:t>Если спросят, сколько это стоит: цифру зал уже видел в прошлом блоке занятия, там постоянная плата за подключённые серверы измерена в токенах и в доле контекста. Здесь важно другое: эта плата вносится ещё раз, отдельно, в контекст каждой заведённой роли.</a:t>
             </a:r>
           </a:p>
           <a:p/>
           <a:p>
             <a:r>
-              <a:t>Если спросят, можно ли подключить сервер только роли, не трогая сессию: можно, и это обратный приём той же механики. Роль умеет объявить нужный ей сервер у себя — он поднимается на её старте и отключается на её завершении, а окно родителя его описаний не видит вовсе. Для тяжёлого сервера, нужного одной задаче, это дешевле, чем держать его подключённым всю сессию.</a:t>
+              <a:t>Если спросят, можно ли подключить сервер только роли, не трогая сессию: можно, и это обратный приём той же механики. Роль умеет объявить нужный ей сервер у себя — он поднимается на её старте и отключается на её завершении, а контекст вызвавшей сессии его описаний не видит вовсе. Для тяжёлого сервера, нужного одной задаче, это дешевле, чем держать его подключённым всю сессию.</a:t>
             </a:r>
           </a:p>
           <a:p/>
           <a:p>
             <a:r>
-              <a:t>Если спросят, относится ли то же к хукам и скиллам: механика у них своя, и сегодня мы её не разбираем. Здесь достаточно одного: отключение ненужных серверов — это осознанный ход перед заведением роли. Разовая уборка в начале дня его не заменяет, потому что сессия обрастает серверами по ходу работы.</a:t>
+              <a:t>Если спросят, относится ли то же к хукам и скиллам: механика у них своя, и сегодня мы её не разбираем. Здесь достаточно одного: отключение ненужных серверов — осознанный ход перед заведением роли. Разовая уборка в начале дня его не заменяет, потому что сессия обрастает серверами по ходу работы.</a:t>
             </a:r>
           </a:p>
         </p:txBody>
@@ -3589,7 +3589,7 @@
                 </a:solidFill>
                 <a:latin typeface="Arial"/>
               </a:rPr>
-              <a:t>Чистое окно — не чистое от всего подряд</a:t>
+              <a:t>Чистый контекст — не от всего подряд</a:t>
             </a:r>
           </a:p>
         </p:txBody>
@@ -3602,7 +3602,7 @@
         </p:nvSpPr>
         <p:spPr>
           <a:xfrm>
-            <a:off x="502920" y="1490472"/>
+            <a:off x="502920" y="1395984"/>
             <a:ext cx="32004" cy="733805"/>
           </a:xfrm>
           <a:prstGeom prst="rect">
@@ -3646,7 +3646,7 @@
         </p:nvSpPr>
         <p:spPr>
           <a:xfrm>
-            <a:off x="772668" y="1545336"/>
+            <a:off x="772668" y="1450848"/>
             <a:ext cx="10730484" cy="624077"/>
           </a:xfrm>
           <a:prstGeom prst="rect">
@@ -3697,7 +3697,95 @@
         </p:nvSpPr>
         <p:spPr>
           <a:xfrm>
-            <a:off x="502920" y="2928366"/>
+            <a:off x="502920" y="2833878"/>
+            <a:ext cx="82296" cy="1219200"/>
+          </a:xfrm>
+          <a:prstGeom prst="roundRect">
+            <a:avLst>
+              <a:gd name="adj" fmla="val 50000"/>
+            </a:avLst>
+          </a:prstGeom>
+          <a:solidFill>
+            <a:srgbClr val="F0AB00"/>
+          </a:solidFill>
+          <a:ln>
+            <a:noFill/>
+          </a:ln>
+          <a:effectLst/>
+        </p:spPr>
+        <p:style>
+          <a:lnRef idx="1">
+            <a:schemeClr val="accent1"/>
+          </a:lnRef>
+          <a:fillRef idx="3">
+            <a:schemeClr val="accent1"/>
+          </a:fillRef>
+          <a:effectRef idx="2">
+            <a:schemeClr val="accent1"/>
+          </a:effectRef>
+          <a:fontRef idx="minor">
+            <a:schemeClr val="lt1"/>
+          </a:fontRef>
+        </p:style>
+        <p:txBody>
+          <a:bodyPr rtlCol="0" anchor="ctr"/>
+          <a:lstStyle/>
+          <a:p>
+            <a:pPr algn="ctr"/>
+          </a:p>
+        </p:txBody>
+      </p:sp>
+      <p:sp>
+        <p:nvSpPr>
+          <p:cNvPr id="6" name="TextBox 5"/>
+          <p:cNvSpPr txBox="1"/>
+          <p:nvPr/>
+        </p:nvSpPr>
+        <p:spPr>
+          <a:xfrm>
+            <a:off x="859536" y="2961894"/>
+            <a:ext cx="10643616" cy="963168"/>
+          </a:xfrm>
+          <a:prstGeom prst="rect">
+            <a:avLst/>
+          </a:prstGeom>
+          <a:noFill/>
+        </p:spPr>
+        <p:txBody>
+          <a:bodyPr wrap="square" lIns="0" rIns="0" tIns="0" bIns="0" anchor="ctr">
+            <a:spAutoFit/>
+          </a:bodyPr>
+          <a:lstStyle/>
+          <a:p>
+            <a:pPr algn="l">
+              <a:lnSpc>
+                <a:spcPts val="1860"/>
+              </a:lnSpc>
+              <a:spcAft>
+                <a:spcPts val="300"/>
+              </a:spcAft>
+            </a:pPr>
+            <a:r>
+              <a:rPr sz="1500" b="1" i="0">
+                <a:solidFill>
+                  <a:srgbClr val="141B2E"/>
+                </a:solidFill>
+                <a:latin typeface="Arial"/>
+              </a:rPr>
+              <a:t>Это третья полоса со схемы базы — «описания подключённых серверов». В контекст роли она переезжает целиком. Для нашего поиска по лимиту участников: если в сессии подключены трекер задач и почтовый сервер из прошлого раздела занятия, роль, которой нужно прочитать сорок файлов кода, получает их описания бесплатно.</a:t>
+            </a:r>
+          </a:p>
+        </p:txBody>
+      </p:sp>
+      <p:sp>
+        <p:nvSpPr>
+          <p:cNvPr id="7" name="Rounded Rectangle 6"/>
+          <p:cNvSpPr/>
+          <p:nvPr/>
+        </p:nvSpPr>
+        <p:spPr>
+          <a:xfrm>
+            <a:off x="502920" y="4720590"/>
             <a:ext cx="82296" cy="982980"/>
           </a:xfrm>
           <a:prstGeom prst="roundRect">
@@ -3737,13 +3825,13 @@
       </p:sp>
       <p:sp>
         <p:nvSpPr>
-          <p:cNvPr id="6" name="TextBox 5"/>
+          <p:cNvPr id="8" name="TextBox 7"/>
           <p:cNvSpPr txBox="1"/>
           <p:nvPr/>
         </p:nvSpPr>
         <p:spPr>
           <a:xfrm>
-            <a:off x="859536" y="3056382"/>
+            <a:off x="859536" y="4848605"/>
             <a:ext cx="10643616" cy="726948"/>
           </a:xfrm>
           <a:prstGeom prst="rect">
@@ -3772,95 +3860,7 @@
                 </a:solidFill>
                 <a:latin typeface="Arial"/>
               </a:rPr>
-              <a:t>Фокус из прошлых двух слайдов — про содержимое репозитория. Для того, что подключено MCP-серверами, за этим нужно следить отдельно: тем же списком инструментов роли, который стоял пятым блоком на одностраничнике ступени.</a:t>
-            </a:r>
-          </a:p>
-        </p:txBody>
-      </p:sp>
-      <p:sp>
-        <p:nvSpPr>
-          <p:cNvPr id="7" name="Rounded Rectangle 6"/>
-          <p:cNvSpPr/>
-          <p:nvPr/>
-        </p:nvSpPr>
-        <p:spPr>
-          <a:xfrm>
-            <a:off x="502920" y="4578858"/>
-            <a:ext cx="82296" cy="982980"/>
-          </a:xfrm>
-          <a:prstGeom prst="roundRect">
-            <a:avLst>
-              <a:gd name="adj" fmla="val 50000"/>
-            </a:avLst>
-          </a:prstGeom>
-          <a:solidFill>
-            <a:srgbClr val="F0AB00"/>
-          </a:solidFill>
-          <a:ln>
-            <a:noFill/>
-          </a:ln>
-          <a:effectLst/>
-        </p:spPr>
-        <p:style>
-          <a:lnRef idx="1">
-            <a:schemeClr val="accent1"/>
-          </a:lnRef>
-          <a:fillRef idx="3">
-            <a:schemeClr val="accent1"/>
-          </a:fillRef>
-          <a:effectRef idx="2">
-            <a:schemeClr val="accent1"/>
-          </a:effectRef>
-          <a:fontRef idx="minor">
-            <a:schemeClr val="lt1"/>
-          </a:fontRef>
-        </p:style>
-        <p:txBody>
-          <a:bodyPr rtlCol="0" anchor="ctr"/>
-          <a:lstStyle/>
-          <a:p>
-            <a:pPr algn="ctr"/>
-          </a:p>
-        </p:txBody>
-      </p:sp>
-      <p:sp>
-        <p:nvSpPr>
-          <p:cNvPr id="8" name="TextBox 7"/>
-          <p:cNvSpPr txBox="1"/>
-          <p:nvPr/>
-        </p:nvSpPr>
-        <p:spPr>
-          <a:xfrm>
-            <a:off x="859536" y="4706874"/>
-            <a:ext cx="10643616" cy="726948"/>
-          </a:xfrm>
-          <a:prstGeom prst="rect">
-            <a:avLst/>
-          </a:prstGeom>
-          <a:noFill/>
-        </p:spPr>
-        <p:txBody>
-          <a:bodyPr wrap="square" lIns="0" rIns="0" tIns="0" bIns="0" anchor="ctr">
-            <a:spAutoFit/>
-          </a:bodyPr>
-          <a:lstStyle/>
-          <a:p>
-            <a:pPr algn="l">
-              <a:lnSpc>
-                <a:spcPts val="1860"/>
-              </a:lnSpc>
-              <a:spcAft>
-                <a:spcPts val="300"/>
-              </a:spcAft>
-            </a:pPr>
-            <a:r>
-              <a:rPr sz="1500" b="1" i="0">
-                <a:solidFill>
-                  <a:srgbClr val="141B2E"/>
-                </a:solidFill>
-                <a:latin typeface="Arial"/>
-              </a:rPr>
-              <a:t>Для нашего вопроса про лимит участников: если в родительской сессии подключены трекер задач и почтовый сервер из прошлого раздела занятия, роль, которой нужно просто прочитать сорок файлов кода, получает их описания в своё окно бесплатно — хотя ни трекер, ни почта к вопросу не относятся.</a:t>
+              <a:t>Фокус из прошлых двух слайдов — про содержимое репозитория. За тем, что подключено серверами, следят отдельно: тем же списком инструментов роли, который стоит пятым блоком на одностраничнике ступени.</a:t>
             </a:r>
           </a:p>
         </p:txBody>
@@ -3902,7 +3902,7 @@
                 </a:solidFill>
                 <a:latin typeface="Arial"/>
               </a:rPr>
-              <a:t>42</a:t>
+              <a:t>43</a:t>
             </a:r>
           </a:p>
         </p:txBody>
